--- a/docs/studyos-tool-testing-session.pptx
+++ b/docs/studyos-tool-testing-session.pptx
@@ -4206,7 +4206,7 @@
                   <a:srgbClr val="000000"/>
                 </a:solidFill>
               </a:rPr>
-              <a:t>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</a:t>
+              <a:t>[Removed: configure your own API key]</a:t>
             </a:r>
           </a:p>
         </p:txBody>
